--- a/дизайн.pptx
+++ b/дизайн.pptx
@@ -122,6 +122,11 @@
       </a:defRPr>
     </a:lvl9pPr>
   </p:defaultTextStyle>
+  <p:extLst>
+    <p:ext uri="{EFAFB233-063F-42B5-8137-9DF3F51BA10A}">
+      <p15:sldGuideLst xmlns:p15="http://schemas.microsoft.com/office/powerpoint/2012/main"/>
+    </p:ext>
+  </p:extLst>
 </p:presentation>
 </file>
 
@@ -5241,7 +5246,7 @@
                 <a:uFillTx/>
                 <a:latin typeface="Montserrat Alternates" pitchFamily="2"/>
               </a:rPr>
-              <a:t>Гибкая система напоминаний</a:t>
+              <a:t>Хорошие новости каждый день</a:t>
             </a:r>
           </a:p>
           <a:p>
@@ -5336,7 +5341,7 @@
                 <a:uFillTx/>
                 <a:latin typeface="Montserrat Alternates" pitchFamily="2"/>
               </a:rPr>
-              <a:t>Адаптивная статистика</a:t>
+              <a:t>Гибкая система напоминаний</a:t>
             </a:r>
           </a:p>
         </p:txBody>
@@ -5398,7 +5403,7 @@
                 <a:uFillTx/>
                 <a:latin typeface="Montserrat Alternates" pitchFamily="2"/>
               </a:rPr>
-              <a:t>Встроенное обучение</a:t>
+              <a:t>Адаптивная статистика</a:t>
             </a:r>
             <a:endParaRPr lang="ru-RU" sz="1800" b="0" i="0" u="none" strike="noStrike" kern="1200" cap="none" spc="0" baseline="0" dirty="0">
               <a:solidFill>
@@ -5470,7 +5475,7 @@
                 <a:uFillTx/>
                 <a:latin typeface="Montserrat Alternates" pitchFamily="2"/>
               </a:rPr>
-              <a:t>Хорошие новости каждый день</a:t>
+              <a:t>Встроенное обучение</a:t>
             </a:r>
           </a:p>
           <a:p>
@@ -5880,13 +5885,13 @@
   <p:clrMapOvr>
     <a:masterClrMapping/>
   </p:clrMapOvr>
-  <mc:AlternateContent xmlns:mc="http://schemas.openxmlformats.org/markup-compatibility/2006">
-    <mc:Choice xmlns:p14="http://schemas.microsoft.com/office/powerpoint/2010/main" Requires="p14">
+  <mc:AlternateContent xmlns:mc="http://schemas.openxmlformats.org/markup-compatibility/2006" xmlns:p14="http://schemas.microsoft.com/office/powerpoint/2010/main">
+    <mc:Choice Requires="p14">
       <p:transition spd="med" p14:dur="700">
         <p:fade/>
       </p:transition>
     </mc:Choice>
-    <mc:Fallback>
+    <mc:Fallback xmlns="">
       <p:transition spd="med">
         <p:fade/>
       </p:transition>
@@ -8347,7 +8352,7 @@
         </p:nvSpPr>
         <p:spPr>
           <a:xfrm>
-            <a:off x="1716938" y="1017639"/>
+            <a:off x="1716938" y="834759"/>
             <a:ext cx="6646743" cy="1342951"/>
           </a:xfrm>
           <a:prstGeom prst="rect">
@@ -9146,7 +9151,7 @@
         </p:nvSpPr>
         <p:spPr>
           <a:xfrm>
-            <a:off x="1716938" y="1017639"/>
+            <a:off x="1716938" y="770213"/>
             <a:ext cx="6646743" cy="1342951"/>
           </a:xfrm>
           <a:prstGeom prst="rect">
@@ -9945,7 +9950,7 @@
         </p:nvSpPr>
         <p:spPr>
           <a:xfrm>
-            <a:off x="1716938" y="1017639"/>
+            <a:off x="1716940" y="601245"/>
             <a:ext cx="6646743" cy="1342951"/>
           </a:xfrm>
           <a:prstGeom prst="rect">
@@ -9991,7 +9996,7 @@
                 </a:solidFill>
                 <a:latin typeface="Montserrat Alternates ExtraBold" pitchFamily="2"/>
               </a:rPr>
-              <a:t>Ценность</a:t>
+              <a:t>Ценности</a:t>
             </a:r>
           </a:p>
         </p:txBody>
@@ -10010,8 +10015,8 @@
         </p:nvSpPr>
         <p:spPr>
           <a:xfrm>
-            <a:off x="1390617" y="2979868"/>
-            <a:ext cx="7299386" cy="2031325"/>
+            <a:off x="1140310" y="2643722"/>
+            <a:ext cx="4322379" cy="1107996"/>
           </a:xfrm>
           <a:prstGeom prst="rect">
             <a:avLst/>
@@ -10024,659 +10029,790 @@
           </a:bodyPr>
           <a:lstStyle/>
           <a:p>
-            <a:pPr algn="ctr"/>
-            <a:r>
-              <a:rPr lang="en-US" dirty="0">
-                <a:solidFill>
-                  <a:srgbClr val="F7C667"/>
-                </a:solidFill>
-              </a:rPr>
-              <a:t>Lorem ipsum dolor sit </a:t>
-            </a:r>
-            <a:r>
-              <a:rPr lang="en-US" dirty="0" err="1">
-                <a:solidFill>
-                  <a:srgbClr val="F7C667"/>
-                </a:solidFill>
-              </a:rPr>
-              <a:t>amet</a:t>
-            </a:r>
-            <a:r>
-              <a:rPr lang="en-US" dirty="0">
-                <a:solidFill>
-                  <a:srgbClr val="F7C667"/>
-                </a:solidFill>
-              </a:rPr>
-              <a:t>, </a:t>
-            </a:r>
-            <a:r>
-              <a:rPr lang="en-US" dirty="0" err="1">
-                <a:solidFill>
-                  <a:srgbClr val="F7C667"/>
-                </a:solidFill>
-              </a:rPr>
-              <a:t>consectetur</a:t>
-            </a:r>
-            <a:r>
-              <a:rPr lang="en-US" dirty="0">
-                <a:solidFill>
-                  <a:srgbClr val="F7C667"/>
-                </a:solidFill>
-              </a:rPr>
-              <a:t> </a:t>
-            </a:r>
-            <a:r>
-              <a:rPr lang="en-US" dirty="0" err="1">
-                <a:solidFill>
-                  <a:srgbClr val="F7C667"/>
-                </a:solidFill>
-              </a:rPr>
-              <a:t>adipiscing</a:t>
-            </a:r>
-            <a:r>
-              <a:rPr lang="en-US" dirty="0">
-                <a:solidFill>
-                  <a:srgbClr val="F7C667"/>
-                </a:solidFill>
-              </a:rPr>
-              <a:t> </a:t>
-            </a:r>
-            <a:r>
-              <a:rPr lang="en-US" dirty="0" err="1">
-                <a:solidFill>
-                  <a:srgbClr val="F7C667"/>
-                </a:solidFill>
-              </a:rPr>
-              <a:t>elit</a:t>
-            </a:r>
-            <a:r>
-              <a:rPr lang="en-US" dirty="0">
-                <a:solidFill>
-                  <a:srgbClr val="F7C667"/>
-                </a:solidFill>
-              </a:rPr>
-              <a:t>, sed do </a:t>
-            </a:r>
-            <a:r>
-              <a:rPr lang="en-US" dirty="0" err="1">
-                <a:solidFill>
-                  <a:srgbClr val="F7C667"/>
-                </a:solidFill>
-              </a:rPr>
-              <a:t>eiusmod</a:t>
-            </a:r>
-            <a:r>
-              <a:rPr lang="en-US" dirty="0">
-                <a:solidFill>
-                  <a:srgbClr val="F7C667"/>
-                </a:solidFill>
-              </a:rPr>
-              <a:t> </a:t>
-            </a:r>
-            <a:r>
-              <a:rPr lang="en-US" dirty="0" err="1">
-                <a:solidFill>
-                  <a:srgbClr val="F7C667"/>
-                </a:solidFill>
-              </a:rPr>
-              <a:t>tempor</a:t>
-            </a:r>
-            <a:r>
-              <a:rPr lang="en-US" dirty="0">
-                <a:solidFill>
-                  <a:srgbClr val="F7C667"/>
-                </a:solidFill>
-              </a:rPr>
-              <a:t> </a:t>
-            </a:r>
-            <a:r>
-              <a:rPr lang="en-US" dirty="0" err="1">
-                <a:solidFill>
-                  <a:srgbClr val="F7C667"/>
-                </a:solidFill>
-              </a:rPr>
-              <a:t>incididunt</a:t>
-            </a:r>
-            <a:r>
-              <a:rPr lang="en-US" dirty="0">
-                <a:solidFill>
-                  <a:srgbClr val="F7C667"/>
-                </a:solidFill>
-              </a:rPr>
-              <a:t> </a:t>
-            </a:r>
-            <a:r>
-              <a:rPr lang="en-US" dirty="0" err="1">
-                <a:solidFill>
-                  <a:srgbClr val="F7C667"/>
-                </a:solidFill>
-              </a:rPr>
-              <a:t>ut</a:t>
-            </a:r>
-            <a:r>
-              <a:rPr lang="en-US" dirty="0">
-                <a:solidFill>
-                  <a:srgbClr val="F7C667"/>
-                </a:solidFill>
-              </a:rPr>
-              <a:t> labore et dolore magna </a:t>
-            </a:r>
-            <a:r>
-              <a:rPr lang="en-US" dirty="0" err="1">
-                <a:solidFill>
-                  <a:srgbClr val="F7C667"/>
-                </a:solidFill>
-              </a:rPr>
-              <a:t>aliqua</a:t>
-            </a:r>
-            <a:r>
-              <a:rPr lang="en-US" dirty="0">
-                <a:solidFill>
-                  <a:srgbClr val="F7C667"/>
-                </a:solidFill>
-              </a:rPr>
-              <a:t>. Ut </a:t>
-            </a:r>
-            <a:r>
-              <a:rPr lang="en-US" dirty="0" err="1">
-                <a:solidFill>
-                  <a:srgbClr val="F7C667"/>
-                </a:solidFill>
-              </a:rPr>
-              <a:t>enim</a:t>
-            </a:r>
-            <a:r>
-              <a:rPr lang="en-US" dirty="0">
-                <a:solidFill>
-                  <a:srgbClr val="F7C667"/>
-                </a:solidFill>
-              </a:rPr>
-              <a:t> ad minim </a:t>
-            </a:r>
-            <a:r>
-              <a:rPr lang="en-US" dirty="0" err="1">
-                <a:solidFill>
-                  <a:srgbClr val="F7C667"/>
-                </a:solidFill>
-              </a:rPr>
-              <a:t>veniam</a:t>
-            </a:r>
-            <a:r>
-              <a:rPr lang="en-US" dirty="0">
-                <a:solidFill>
-                  <a:srgbClr val="F7C667"/>
-                </a:solidFill>
-              </a:rPr>
-              <a:t>, </a:t>
-            </a:r>
-            <a:r>
-              <a:rPr lang="en-US" dirty="0" err="1">
-                <a:solidFill>
-                  <a:srgbClr val="F7C667"/>
-                </a:solidFill>
-              </a:rPr>
-              <a:t>quis</a:t>
-            </a:r>
-            <a:r>
-              <a:rPr lang="en-US" dirty="0">
-                <a:solidFill>
-                  <a:srgbClr val="F7C667"/>
-                </a:solidFill>
-              </a:rPr>
-              <a:t> </a:t>
-            </a:r>
-            <a:r>
-              <a:rPr lang="en-US" dirty="0" err="1">
-                <a:solidFill>
-                  <a:srgbClr val="F7C667"/>
-                </a:solidFill>
-              </a:rPr>
-              <a:t>nostrud</a:t>
-            </a:r>
-            <a:r>
-              <a:rPr lang="en-US" dirty="0">
-                <a:solidFill>
-                  <a:srgbClr val="F7C667"/>
-                </a:solidFill>
-              </a:rPr>
-              <a:t> exercitation </a:t>
-            </a:r>
-            <a:r>
-              <a:rPr lang="en-US" dirty="0" err="1">
-                <a:solidFill>
-                  <a:srgbClr val="F7C667"/>
-                </a:solidFill>
-              </a:rPr>
-              <a:t>ullamco</a:t>
-            </a:r>
-            <a:r>
-              <a:rPr lang="en-US" dirty="0">
-                <a:solidFill>
-                  <a:srgbClr val="F7C667"/>
-                </a:solidFill>
-              </a:rPr>
-              <a:t> </a:t>
-            </a:r>
-            <a:r>
-              <a:rPr lang="en-US" dirty="0" err="1">
-                <a:solidFill>
-                  <a:srgbClr val="F7C667"/>
-                </a:solidFill>
-              </a:rPr>
-              <a:t>laboris</a:t>
-            </a:r>
-            <a:r>
-              <a:rPr lang="en-US" dirty="0">
-                <a:solidFill>
-                  <a:srgbClr val="F7C667"/>
-                </a:solidFill>
-              </a:rPr>
-              <a:t> nisi </a:t>
-            </a:r>
-            <a:r>
-              <a:rPr lang="en-US" dirty="0" err="1">
-                <a:solidFill>
-                  <a:srgbClr val="F7C667"/>
-                </a:solidFill>
-              </a:rPr>
-              <a:t>ut</a:t>
-            </a:r>
-            <a:r>
-              <a:rPr lang="en-US" dirty="0">
-                <a:solidFill>
-                  <a:srgbClr val="F7C667"/>
-                </a:solidFill>
-              </a:rPr>
-              <a:t> </a:t>
-            </a:r>
-            <a:r>
-              <a:rPr lang="en-US" dirty="0" err="1">
-                <a:solidFill>
-                  <a:srgbClr val="F7C667"/>
-                </a:solidFill>
-              </a:rPr>
-              <a:t>aliquip</a:t>
-            </a:r>
-            <a:r>
-              <a:rPr lang="en-US" dirty="0">
-                <a:solidFill>
-                  <a:srgbClr val="F7C667"/>
-                </a:solidFill>
-              </a:rPr>
-              <a:t> ex </a:t>
-            </a:r>
-            <a:r>
-              <a:rPr lang="en-US" dirty="0" err="1">
-                <a:solidFill>
-                  <a:srgbClr val="F7C667"/>
-                </a:solidFill>
-              </a:rPr>
-              <a:t>ea</a:t>
-            </a:r>
-            <a:r>
-              <a:rPr lang="en-US" dirty="0">
-                <a:solidFill>
-                  <a:srgbClr val="F7C667"/>
-                </a:solidFill>
-              </a:rPr>
-              <a:t> </a:t>
-            </a:r>
-            <a:r>
-              <a:rPr lang="en-US" dirty="0" err="1">
-                <a:solidFill>
-                  <a:srgbClr val="F7C667"/>
-                </a:solidFill>
-              </a:rPr>
-              <a:t>commodo</a:t>
-            </a:r>
-            <a:r>
-              <a:rPr lang="en-US" dirty="0">
-                <a:solidFill>
-                  <a:srgbClr val="F7C667"/>
-                </a:solidFill>
-              </a:rPr>
-              <a:t> </a:t>
-            </a:r>
-            <a:r>
-              <a:rPr lang="en-US" dirty="0" err="1">
-                <a:solidFill>
-                  <a:srgbClr val="F7C667"/>
-                </a:solidFill>
-              </a:rPr>
-              <a:t>consequat</a:t>
-            </a:r>
-            <a:r>
-              <a:rPr lang="en-US" dirty="0">
-                <a:solidFill>
-                  <a:srgbClr val="F7C667"/>
-                </a:solidFill>
-              </a:rPr>
-              <a:t>. Duis </a:t>
-            </a:r>
-            <a:r>
-              <a:rPr lang="en-US" dirty="0" err="1">
-                <a:solidFill>
-                  <a:srgbClr val="F7C667"/>
-                </a:solidFill>
-              </a:rPr>
-              <a:t>aute</a:t>
-            </a:r>
-            <a:r>
-              <a:rPr lang="en-US" dirty="0">
-                <a:solidFill>
-                  <a:srgbClr val="F7C667"/>
-                </a:solidFill>
-              </a:rPr>
-              <a:t> </a:t>
-            </a:r>
-            <a:r>
-              <a:rPr lang="en-US" dirty="0" err="1">
-                <a:solidFill>
-                  <a:srgbClr val="F7C667"/>
-                </a:solidFill>
-              </a:rPr>
-              <a:t>irure</a:t>
-            </a:r>
-            <a:r>
-              <a:rPr lang="en-US" dirty="0">
-                <a:solidFill>
-                  <a:srgbClr val="F7C667"/>
-                </a:solidFill>
-              </a:rPr>
-              <a:t> dolor in </a:t>
-            </a:r>
-            <a:r>
-              <a:rPr lang="en-US" dirty="0" err="1">
-                <a:solidFill>
-                  <a:srgbClr val="F7C667"/>
-                </a:solidFill>
-              </a:rPr>
-              <a:t>reprehenderit</a:t>
-            </a:r>
-            <a:r>
-              <a:rPr lang="en-US" dirty="0">
-                <a:solidFill>
-                  <a:srgbClr val="F7C667"/>
-                </a:solidFill>
-              </a:rPr>
-              <a:t> in </a:t>
-            </a:r>
-            <a:r>
-              <a:rPr lang="en-US" dirty="0" err="1">
-                <a:solidFill>
-                  <a:srgbClr val="F7C667"/>
-                </a:solidFill>
-              </a:rPr>
-              <a:t>voluptate</a:t>
-            </a:r>
-            <a:r>
-              <a:rPr lang="en-US" dirty="0">
-                <a:solidFill>
-                  <a:srgbClr val="F7C667"/>
-                </a:solidFill>
-              </a:rPr>
-              <a:t> </a:t>
-            </a:r>
-            <a:r>
-              <a:rPr lang="en-US" dirty="0" err="1">
-                <a:solidFill>
-                  <a:srgbClr val="F7C667"/>
-                </a:solidFill>
-              </a:rPr>
-              <a:t>velit</a:t>
-            </a:r>
-            <a:r>
-              <a:rPr lang="en-US" dirty="0">
-                <a:solidFill>
-                  <a:srgbClr val="F7C667"/>
-                </a:solidFill>
-              </a:rPr>
-              <a:t> esse </a:t>
-            </a:r>
-            <a:r>
-              <a:rPr lang="en-US" dirty="0" err="1">
-                <a:solidFill>
-                  <a:srgbClr val="F7C667"/>
-                </a:solidFill>
-              </a:rPr>
-              <a:t>cillum</a:t>
-            </a:r>
-            <a:r>
-              <a:rPr lang="en-US" dirty="0">
-                <a:solidFill>
-                  <a:srgbClr val="F7C667"/>
-                </a:solidFill>
-              </a:rPr>
-              <a:t> dolore </a:t>
-            </a:r>
-            <a:r>
-              <a:rPr lang="en-US" dirty="0" err="1">
-                <a:solidFill>
-                  <a:srgbClr val="F7C667"/>
-                </a:solidFill>
-              </a:rPr>
-              <a:t>eu</a:t>
-            </a:r>
-            <a:r>
-              <a:rPr lang="en-US" dirty="0">
-                <a:solidFill>
-                  <a:srgbClr val="F7C667"/>
-                </a:solidFill>
-              </a:rPr>
-              <a:t> </a:t>
-            </a:r>
-            <a:r>
-              <a:rPr lang="en-US" dirty="0" err="1">
-                <a:solidFill>
-                  <a:srgbClr val="F7C667"/>
-                </a:solidFill>
-              </a:rPr>
-              <a:t>fugiat</a:t>
-            </a:r>
-            <a:r>
-              <a:rPr lang="en-US" dirty="0">
-                <a:solidFill>
-                  <a:srgbClr val="F7C667"/>
-                </a:solidFill>
-              </a:rPr>
-              <a:t> </a:t>
-            </a:r>
-            <a:r>
-              <a:rPr lang="en-US" dirty="0" err="1">
-                <a:solidFill>
-                  <a:srgbClr val="F7C667"/>
-                </a:solidFill>
-              </a:rPr>
-              <a:t>nulla</a:t>
-            </a:r>
-            <a:r>
-              <a:rPr lang="en-US" dirty="0">
-                <a:solidFill>
-                  <a:srgbClr val="F7C667"/>
-                </a:solidFill>
-              </a:rPr>
-              <a:t> </a:t>
-            </a:r>
-            <a:r>
-              <a:rPr lang="en-US" dirty="0" err="1">
-                <a:solidFill>
-                  <a:srgbClr val="F7C667"/>
-                </a:solidFill>
-              </a:rPr>
-              <a:t>pariatur</a:t>
-            </a:r>
-            <a:r>
-              <a:rPr lang="en-US" dirty="0">
-                <a:solidFill>
-                  <a:srgbClr val="F7C667"/>
-                </a:solidFill>
-              </a:rPr>
-              <a:t>. </a:t>
-            </a:r>
-            <a:r>
-              <a:rPr lang="en-US" dirty="0" err="1">
-                <a:solidFill>
-                  <a:srgbClr val="F7C667"/>
-                </a:solidFill>
-              </a:rPr>
-              <a:t>Excepteur</a:t>
-            </a:r>
-            <a:r>
-              <a:rPr lang="en-US" dirty="0">
-                <a:solidFill>
-                  <a:srgbClr val="F7C667"/>
-                </a:solidFill>
-              </a:rPr>
-              <a:t> </a:t>
-            </a:r>
-            <a:r>
-              <a:rPr lang="en-US" dirty="0" err="1">
-                <a:solidFill>
-                  <a:srgbClr val="F7C667"/>
-                </a:solidFill>
-              </a:rPr>
-              <a:t>sint</a:t>
-            </a:r>
-            <a:r>
-              <a:rPr lang="en-US" dirty="0">
-                <a:solidFill>
-                  <a:srgbClr val="F7C667"/>
-                </a:solidFill>
-              </a:rPr>
-              <a:t> </a:t>
-            </a:r>
-            <a:r>
-              <a:rPr lang="en-US" dirty="0" err="1">
-                <a:solidFill>
-                  <a:srgbClr val="F7C667"/>
-                </a:solidFill>
-              </a:rPr>
-              <a:t>occaecat</a:t>
-            </a:r>
-            <a:r>
-              <a:rPr lang="en-US" dirty="0">
-                <a:solidFill>
-                  <a:srgbClr val="F7C667"/>
-                </a:solidFill>
-              </a:rPr>
-              <a:t> </a:t>
-            </a:r>
-            <a:r>
-              <a:rPr lang="en-US" dirty="0" err="1">
-                <a:solidFill>
-                  <a:srgbClr val="F7C667"/>
-                </a:solidFill>
-              </a:rPr>
-              <a:t>cupidatat</a:t>
-            </a:r>
-            <a:r>
-              <a:rPr lang="en-US" dirty="0">
-                <a:solidFill>
-                  <a:srgbClr val="F7C667"/>
-                </a:solidFill>
-              </a:rPr>
-              <a:t> non </a:t>
-            </a:r>
-            <a:r>
-              <a:rPr lang="en-US" dirty="0" err="1">
-                <a:solidFill>
-                  <a:srgbClr val="F7C667"/>
-                </a:solidFill>
-              </a:rPr>
-              <a:t>proident</a:t>
-            </a:r>
-            <a:r>
-              <a:rPr lang="en-US" dirty="0">
-                <a:solidFill>
-                  <a:srgbClr val="F7C667"/>
-                </a:solidFill>
-              </a:rPr>
-              <a:t>, sunt in culpa qui </a:t>
-            </a:r>
-            <a:r>
-              <a:rPr lang="en-US" dirty="0" err="1">
-                <a:solidFill>
-                  <a:srgbClr val="F7C667"/>
-                </a:solidFill>
-              </a:rPr>
-              <a:t>officia</a:t>
-            </a:r>
-            <a:r>
-              <a:rPr lang="en-US" dirty="0">
-                <a:solidFill>
-                  <a:srgbClr val="F7C667"/>
-                </a:solidFill>
-              </a:rPr>
-              <a:t> </a:t>
-            </a:r>
-            <a:r>
-              <a:rPr lang="en-US" dirty="0" err="1">
-                <a:solidFill>
-                  <a:srgbClr val="F7C667"/>
-                </a:solidFill>
-              </a:rPr>
-              <a:t>deserunt</a:t>
-            </a:r>
-            <a:r>
-              <a:rPr lang="en-US" dirty="0">
-                <a:solidFill>
-                  <a:srgbClr val="F7C667"/>
-                </a:solidFill>
-              </a:rPr>
-              <a:t> </a:t>
-            </a:r>
-            <a:r>
-              <a:rPr lang="en-US" dirty="0" err="1">
-                <a:solidFill>
-                  <a:srgbClr val="F7C667"/>
-                </a:solidFill>
-              </a:rPr>
-              <a:t>mollit</a:t>
-            </a:r>
-            <a:r>
-              <a:rPr lang="en-US" dirty="0">
-                <a:solidFill>
-                  <a:srgbClr val="F7C667"/>
-                </a:solidFill>
-              </a:rPr>
-              <a:t> </a:t>
-            </a:r>
-            <a:r>
-              <a:rPr lang="en-US" dirty="0" err="1">
-                <a:solidFill>
-                  <a:srgbClr val="F7C667"/>
-                </a:solidFill>
-              </a:rPr>
-              <a:t>anim</a:t>
-            </a:r>
-            <a:r>
-              <a:rPr lang="en-US" dirty="0">
-                <a:solidFill>
-                  <a:srgbClr val="F7C667"/>
-                </a:solidFill>
-              </a:rPr>
-              <a:t> id est </a:t>
-            </a:r>
-            <a:r>
-              <a:rPr lang="en-US" dirty="0" err="1">
-                <a:solidFill>
-                  <a:srgbClr val="F7C667"/>
-                </a:solidFill>
-              </a:rPr>
-              <a:t>laborum</a:t>
-            </a:r>
-            <a:r>
-              <a:rPr lang="en-US" dirty="0">
-                <a:solidFill>
-                  <a:srgbClr val="F7C667"/>
-                </a:solidFill>
-              </a:rPr>
-              <a:t>.</a:t>
-            </a:r>
+            <a:pPr marL="285750" indent="-285750" algn="ctr">
+              <a:lnSpc>
+                <a:spcPct val="200000"/>
+              </a:lnSpc>
+              <a:buFont typeface="Courier New" panose="02070309020205020404" pitchFamily="49" charset="0"/>
+              <a:buChar char="o"/>
+            </a:pPr>
+            <a:r>
+              <a:rPr lang="ru-RU" sz="2400" dirty="0">
+                <a:solidFill>
+                  <a:srgbClr val="F7C667"/>
+                </a:solidFill>
+              </a:rPr>
+              <a:t>Бережное отношение к себе</a:t>
+            </a:r>
+          </a:p>
+          <a:p>
+            <a:pPr algn="just"/>
             <a:endParaRPr lang="ru-RU" dirty="0">
               <a:solidFill>
                 <a:srgbClr val="F7C667"/>
               </a:solidFill>
+            </a:endParaRPr>
+          </a:p>
+        </p:txBody>
+      </p:sp>
+      <p:sp>
+        <p:nvSpPr>
+          <p:cNvPr id="2" name="Прямоугольник: скругленные углы 27">
+            <a:extLst>
+              <a:ext uri="{FF2B5EF4-FFF2-40B4-BE49-F238E27FC236}">
+                <a16:creationId xmlns:a16="http://schemas.microsoft.com/office/drawing/2014/main" id="{14DD82DB-24B5-4E82-CD05-9B2F831877B9}"/>
+              </a:ext>
+            </a:extLst>
+          </p:cNvPr>
+          <p:cNvSpPr/>
+          <p:nvPr/>
+        </p:nvSpPr>
+        <p:spPr>
+          <a:xfrm>
+            <a:off x="829016" y="2699823"/>
+            <a:ext cx="8723800" cy="995794"/>
+          </a:xfrm>
+          <a:custGeom>
+            <a:avLst>
+              <a:gd name="f10" fmla="val 7338"/>
+            </a:avLst>
+            <a:gdLst>
+              <a:gd name="f1" fmla="val 10800000"/>
+              <a:gd name="f2" fmla="val 5400000"/>
+              <a:gd name="f3" fmla="val 16200000"/>
+              <a:gd name="f4" fmla="val w"/>
+              <a:gd name="f5" fmla="val h"/>
+              <a:gd name="f6" fmla="val ss"/>
+              <a:gd name="f7" fmla="val 0"/>
+              <a:gd name="f8" fmla="*/ 5419351 1 1725033"/>
+              <a:gd name="f9" fmla="val 45"/>
+              <a:gd name="f10" fmla="val 7338"/>
+              <a:gd name="f11" fmla="abs f4"/>
+              <a:gd name="f12" fmla="abs f5"/>
+              <a:gd name="f13" fmla="abs f6"/>
+              <a:gd name="f14" fmla="*/ f8 1 180"/>
+              <a:gd name="f15" fmla="val f10"/>
+              <a:gd name="f16" fmla="+- 0 0 f2"/>
+              <a:gd name="f17" fmla="?: f11 f4 1"/>
+              <a:gd name="f18" fmla="?: f12 f5 1"/>
+              <a:gd name="f19" fmla="?: f13 f6 1"/>
+              <a:gd name="f20" fmla="*/ f9 f14 1"/>
+              <a:gd name="f21" fmla="+- f7 f15 0"/>
+              <a:gd name="f22" fmla="*/ f17 1 21600"/>
+              <a:gd name="f23" fmla="*/ f18 1 21600"/>
+              <a:gd name="f24" fmla="*/ 21600 f17 1"/>
+              <a:gd name="f25" fmla="*/ 21600 f18 1"/>
+              <a:gd name="f26" fmla="+- 0 0 f20"/>
+              <a:gd name="f27" fmla="+- f7 0 f21"/>
+              <a:gd name="f28" fmla="+- f21 0 f7"/>
+              <a:gd name="f29" fmla="min f23 f22"/>
+              <a:gd name="f30" fmla="*/ f24 1 f19"/>
+              <a:gd name="f31" fmla="*/ f25 1 f19"/>
+              <a:gd name="f32" fmla="*/ f26 f1 1"/>
+              <a:gd name="f33" fmla="abs f27"/>
+              <a:gd name="f34" fmla="abs f28"/>
+              <a:gd name="f35" fmla="?: f27 f16 f2"/>
+              <a:gd name="f36" fmla="?: f27 f2 f16"/>
+              <a:gd name="f37" fmla="?: f27 f3 f2"/>
+              <a:gd name="f38" fmla="?: f27 f2 f3"/>
+              <a:gd name="f39" fmla="?: f28 f16 f2"/>
+              <a:gd name="f40" fmla="?: f28 f2 f16"/>
+              <a:gd name="f41" fmla="?: f27 0 f1"/>
+              <a:gd name="f42" fmla="?: f27 f1 0"/>
+              <a:gd name="f43" fmla="val f30"/>
+              <a:gd name="f44" fmla="val f31"/>
+              <a:gd name="f45" fmla="*/ f32 1 f8"/>
+              <a:gd name="f46" fmla="?: f27 f38 f37"/>
+              <a:gd name="f47" fmla="?: f27 f37 f38"/>
+              <a:gd name="f48" fmla="?: f28 f36 f35"/>
+              <a:gd name="f49" fmla="*/ f21 f29 1"/>
+              <a:gd name="f50" fmla="*/ f7 f29 1"/>
+              <a:gd name="f51" fmla="*/ f33 f29 1"/>
+              <a:gd name="f52" fmla="*/ f34 f29 1"/>
+              <a:gd name="f53" fmla="+- f44 0 f15"/>
+              <a:gd name="f54" fmla="+- f43 0 f15"/>
+              <a:gd name="f55" fmla="+- f45 0 f2"/>
+              <a:gd name="f56" fmla="?: f28 f47 f46"/>
+              <a:gd name="f57" fmla="*/ f44 f29 1"/>
+              <a:gd name="f58" fmla="*/ f43 f29 1"/>
+              <a:gd name="f59" fmla="+- f55 f2 0"/>
+              <a:gd name="f60" fmla="+- f44 0 f53"/>
+              <a:gd name="f61" fmla="+- f43 0 f54"/>
+              <a:gd name="f62" fmla="+- f53 0 f44"/>
+              <a:gd name="f63" fmla="+- f54 0 f43"/>
+              <a:gd name="f64" fmla="*/ f53 f29 1"/>
+              <a:gd name="f65" fmla="*/ f54 f29 1"/>
+              <a:gd name="f66" fmla="*/ f59 f8 1"/>
+              <a:gd name="f67" fmla="abs f60"/>
+              <a:gd name="f68" fmla="?: f60 0 f1"/>
+              <a:gd name="f69" fmla="?: f60 f1 0"/>
+              <a:gd name="f70" fmla="?: f60 f39 f40"/>
+              <a:gd name="f71" fmla="abs f61"/>
+              <a:gd name="f72" fmla="abs f62"/>
+              <a:gd name="f73" fmla="?: f61 f16 f2"/>
+              <a:gd name="f74" fmla="?: f61 f2 f16"/>
+              <a:gd name="f75" fmla="?: f61 f3 f2"/>
+              <a:gd name="f76" fmla="?: f61 f2 f3"/>
+              <a:gd name="f77" fmla="abs f63"/>
+              <a:gd name="f78" fmla="?: f63 f16 f2"/>
+              <a:gd name="f79" fmla="?: f63 f2 f16"/>
+              <a:gd name="f80" fmla="?: f63 f42 f41"/>
+              <a:gd name="f81" fmla="?: f63 f41 f42"/>
+              <a:gd name="f82" fmla="*/ f66 1 f1"/>
+              <a:gd name="f83" fmla="?: f28 f69 f68"/>
+              <a:gd name="f84" fmla="?: f28 f68 f69"/>
+              <a:gd name="f85" fmla="?: f61 f76 f75"/>
+              <a:gd name="f86" fmla="?: f61 f75 f76"/>
+              <a:gd name="f87" fmla="?: f62 f74 f73"/>
+              <a:gd name="f88" fmla="?: f27 f80 f81"/>
+              <a:gd name="f89" fmla="?: f27 f78 f79"/>
+              <a:gd name="f90" fmla="*/ f67 f29 1"/>
+              <a:gd name="f91" fmla="*/ f71 f29 1"/>
+              <a:gd name="f92" fmla="*/ f72 f29 1"/>
+              <a:gd name="f93" fmla="*/ f77 f29 1"/>
+              <a:gd name="f94" fmla="+- 0 0 f82"/>
+              <a:gd name="f95" fmla="?: f60 f83 f84"/>
+              <a:gd name="f96" fmla="?: f62 f86 f85"/>
+              <a:gd name="f97" fmla="+- 0 0 f94"/>
+              <a:gd name="f98" fmla="*/ f97 f1 1"/>
+              <a:gd name="f99" fmla="*/ f98 1 f8"/>
+              <a:gd name="f100" fmla="+- f99 0 f2"/>
+              <a:gd name="f101" fmla="cos 1 f100"/>
+              <a:gd name="f102" fmla="+- 0 0 f101"/>
+              <a:gd name="f103" fmla="+- 0 0 f102"/>
+              <a:gd name="f104" fmla="val f103"/>
+              <a:gd name="f105" fmla="+- 0 0 f104"/>
+              <a:gd name="f106" fmla="*/ f15 f105 1"/>
+              <a:gd name="f107" fmla="*/ f106 3163 1"/>
+              <a:gd name="f108" fmla="*/ f107 1 7636"/>
+              <a:gd name="f109" fmla="+- f7 f108 0"/>
+              <a:gd name="f110" fmla="+- f43 0 f108"/>
+              <a:gd name="f111" fmla="+- f44 0 f108"/>
+              <a:gd name="f112" fmla="*/ f109 f29 1"/>
+              <a:gd name="f113" fmla="*/ f110 f29 1"/>
+              <a:gd name="f114" fmla="*/ f111 f29 1"/>
+            </a:gdLst>
+            <a:ahLst/>
+            <a:cxnLst>
+              <a:cxn ang="3cd4">
+                <a:pos x="hc" y="t"/>
+              </a:cxn>
+              <a:cxn ang="0">
+                <a:pos x="r" y="vc"/>
+              </a:cxn>
+              <a:cxn ang="cd4">
+                <a:pos x="hc" y="b"/>
+              </a:cxn>
+              <a:cxn ang="cd2">
+                <a:pos x="l" y="vc"/>
+              </a:cxn>
+            </a:cxnLst>
+            <a:rect l="f112" t="f112" r="f113" b="f114"/>
+            <a:pathLst>
+              <a:path>
+                <a:moveTo>
+                  <a:pt x="f49" y="f50"/>
+                </a:moveTo>
+                <a:arcTo wR="f51" hR="f52" stAng="f56" swAng="f48"/>
+                <a:lnTo>
+                  <a:pt x="f50" y="f64"/>
+                </a:lnTo>
+                <a:arcTo wR="f52" hR="f90" stAng="f95" swAng="f70"/>
+                <a:lnTo>
+                  <a:pt x="f65" y="f57"/>
+                </a:lnTo>
+                <a:arcTo wR="f91" hR="f92" stAng="f96" swAng="f87"/>
+                <a:lnTo>
+                  <a:pt x="f58" y="f49"/>
+                </a:lnTo>
+                <a:arcTo wR="f93" hR="f51" stAng="f88" swAng="f89"/>
+                <a:close/>
+              </a:path>
+            </a:pathLst>
+          </a:custGeom>
+          <a:noFill/>
+          <a:ln w="28575" cap="flat">
+            <a:solidFill>
+              <a:srgbClr val="F7C667"/>
+            </a:solidFill>
+            <a:prstDash val="solid"/>
+          </a:ln>
+        </p:spPr>
+        <p:txBody>
+          <a:bodyPr vert="horz" wrap="square" lIns="91440" tIns="45720" rIns="91440" bIns="45720" anchor="ctr" anchorCtr="1" compatLnSpc="1">
+            <a:noAutofit/>
+          </a:bodyPr>
+          <a:lstStyle/>
+          <a:p>
+            <a:pPr marL="0" marR="0" lvl="0" indent="0" algn="ctr" defTabSz="914400" rtl="0" fontAlgn="auto" hangingPunct="1">
+              <a:lnSpc>
+                <a:spcPct val="100000"/>
+              </a:lnSpc>
+              <a:spcBef>
+                <a:spcPts val="0"/>
+              </a:spcBef>
+              <a:spcAft>
+                <a:spcPts val="0"/>
+              </a:spcAft>
+              <a:buNone/>
+              <a:tabLst/>
+              <a:defRPr sz="1800" b="0" i="0" u="none" strike="noStrike" kern="0" cap="none" spc="0" baseline="0">
+                <a:solidFill>
+                  <a:srgbClr val="000000"/>
+                </a:solidFill>
+                <a:uFillTx/>
+              </a:defRPr>
+            </a:pPr>
+            <a:endParaRPr lang="ru-RU" sz="1800" b="0" i="0" u="none" strike="noStrike" kern="1200" cap="none" spc="0" baseline="0">
+              <a:solidFill>
+                <a:srgbClr val="FFFFFF"/>
+              </a:solidFill>
+              <a:uFillTx/>
+              <a:latin typeface="Calibri"/>
+            </a:endParaRPr>
+          </a:p>
+        </p:txBody>
+      </p:sp>
+      <p:sp>
+        <p:nvSpPr>
+          <p:cNvPr id="3" name="TextBox 2">
+            <a:extLst>
+              <a:ext uri="{FF2B5EF4-FFF2-40B4-BE49-F238E27FC236}">
+                <a16:creationId xmlns:a16="http://schemas.microsoft.com/office/drawing/2014/main" id="{66756F0D-6E19-4800-BF12-904F0783FB89}"/>
+              </a:ext>
+            </a:extLst>
+          </p:cNvPr>
+          <p:cNvSpPr txBox="1"/>
+          <p:nvPr/>
+        </p:nvSpPr>
+        <p:spPr>
+          <a:xfrm>
+            <a:off x="1216298" y="4046340"/>
+            <a:ext cx="5591097" cy="1107996"/>
+          </a:xfrm>
+          <a:prstGeom prst="rect">
+            <a:avLst/>
+          </a:prstGeom>
+          <a:noFill/>
+        </p:spPr>
+        <p:txBody>
+          <a:bodyPr wrap="square" rtlCol="0">
+            <a:spAutoFit/>
+          </a:bodyPr>
+          <a:lstStyle/>
+          <a:p>
+            <a:pPr marL="285750" indent="-285750">
+              <a:lnSpc>
+                <a:spcPct val="200000"/>
+              </a:lnSpc>
+              <a:buFont typeface="Courier New" panose="02070309020205020404" pitchFamily="49" charset="0"/>
+              <a:buChar char="o"/>
+            </a:pPr>
+            <a:r>
+              <a:rPr lang="ru-RU" sz="2400" dirty="0">
+                <a:solidFill>
+                  <a:srgbClr val="F7C667"/>
+                </a:solidFill>
+              </a:rPr>
+              <a:t>Оптимизм</a:t>
+            </a:r>
+          </a:p>
+          <a:p>
+            <a:pPr algn="just"/>
+            <a:endParaRPr lang="ru-RU" dirty="0">
+              <a:solidFill>
+                <a:srgbClr val="F7C667"/>
+              </a:solidFill>
+            </a:endParaRPr>
+          </a:p>
+        </p:txBody>
+      </p:sp>
+      <p:sp>
+        <p:nvSpPr>
+          <p:cNvPr id="4" name="Прямоугольник: скругленные углы 27">
+            <a:extLst>
+              <a:ext uri="{FF2B5EF4-FFF2-40B4-BE49-F238E27FC236}">
+                <a16:creationId xmlns:a16="http://schemas.microsoft.com/office/drawing/2014/main" id="{A9AAAA26-D9B1-9B17-112D-C19666C37BEE}"/>
+              </a:ext>
+            </a:extLst>
+          </p:cNvPr>
+          <p:cNvSpPr/>
+          <p:nvPr/>
+        </p:nvSpPr>
+        <p:spPr>
+          <a:xfrm>
+            <a:off x="829016" y="4090951"/>
+            <a:ext cx="8723800" cy="995794"/>
+          </a:xfrm>
+          <a:custGeom>
+            <a:avLst>
+              <a:gd name="f10" fmla="val 7338"/>
+            </a:avLst>
+            <a:gdLst>
+              <a:gd name="f1" fmla="val 10800000"/>
+              <a:gd name="f2" fmla="val 5400000"/>
+              <a:gd name="f3" fmla="val 16200000"/>
+              <a:gd name="f4" fmla="val w"/>
+              <a:gd name="f5" fmla="val h"/>
+              <a:gd name="f6" fmla="val ss"/>
+              <a:gd name="f7" fmla="val 0"/>
+              <a:gd name="f8" fmla="*/ 5419351 1 1725033"/>
+              <a:gd name="f9" fmla="val 45"/>
+              <a:gd name="f10" fmla="val 7338"/>
+              <a:gd name="f11" fmla="abs f4"/>
+              <a:gd name="f12" fmla="abs f5"/>
+              <a:gd name="f13" fmla="abs f6"/>
+              <a:gd name="f14" fmla="*/ f8 1 180"/>
+              <a:gd name="f15" fmla="val f10"/>
+              <a:gd name="f16" fmla="+- 0 0 f2"/>
+              <a:gd name="f17" fmla="?: f11 f4 1"/>
+              <a:gd name="f18" fmla="?: f12 f5 1"/>
+              <a:gd name="f19" fmla="?: f13 f6 1"/>
+              <a:gd name="f20" fmla="*/ f9 f14 1"/>
+              <a:gd name="f21" fmla="+- f7 f15 0"/>
+              <a:gd name="f22" fmla="*/ f17 1 21600"/>
+              <a:gd name="f23" fmla="*/ f18 1 21600"/>
+              <a:gd name="f24" fmla="*/ 21600 f17 1"/>
+              <a:gd name="f25" fmla="*/ 21600 f18 1"/>
+              <a:gd name="f26" fmla="+- 0 0 f20"/>
+              <a:gd name="f27" fmla="+- f7 0 f21"/>
+              <a:gd name="f28" fmla="+- f21 0 f7"/>
+              <a:gd name="f29" fmla="min f23 f22"/>
+              <a:gd name="f30" fmla="*/ f24 1 f19"/>
+              <a:gd name="f31" fmla="*/ f25 1 f19"/>
+              <a:gd name="f32" fmla="*/ f26 f1 1"/>
+              <a:gd name="f33" fmla="abs f27"/>
+              <a:gd name="f34" fmla="abs f28"/>
+              <a:gd name="f35" fmla="?: f27 f16 f2"/>
+              <a:gd name="f36" fmla="?: f27 f2 f16"/>
+              <a:gd name="f37" fmla="?: f27 f3 f2"/>
+              <a:gd name="f38" fmla="?: f27 f2 f3"/>
+              <a:gd name="f39" fmla="?: f28 f16 f2"/>
+              <a:gd name="f40" fmla="?: f28 f2 f16"/>
+              <a:gd name="f41" fmla="?: f27 0 f1"/>
+              <a:gd name="f42" fmla="?: f27 f1 0"/>
+              <a:gd name="f43" fmla="val f30"/>
+              <a:gd name="f44" fmla="val f31"/>
+              <a:gd name="f45" fmla="*/ f32 1 f8"/>
+              <a:gd name="f46" fmla="?: f27 f38 f37"/>
+              <a:gd name="f47" fmla="?: f27 f37 f38"/>
+              <a:gd name="f48" fmla="?: f28 f36 f35"/>
+              <a:gd name="f49" fmla="*/ f21 f29 1"/>
+              <a:gd name="f50" fmla="*/ f7 f29 1"/>
+              <a:gd name="f51" fmla="*/ f33 f29 1"/>
+              <a:gd name="f52" fmla="*/ f34 f29 1"/>
+              <a:gd name="f53" fmla="+- f44 0 f15"/>
+              <a:gd name="f54" fmla="+- f43 0 f15"/>
+              <a:gd name="f55" fmla="+- f45 0 f2"/>
+              <a:gd name="f56" fmla="?: f28 f47 f46"/>
+              <a:gd name="f57" fmla="*/ f44 f29 1"/>
+              <a:gd name="f58" fmla="*/ f43 f29 1"/>
+              <a:gd name="f59" fmla="+- f55 f2 0"/>
+              <a:gd name="f60" fmla="+- f44 0 f53"/>
+              <a:gd name="f61" fmla="+- f43 0 f54"/>
+              <a:gd name="f62" fmla="+- f53 0 f44"/>
+              <a:gd name="f63" fmla="+- f54 0 f43"/>
+              <a:gd name="f64" fmla="*/ f53 f29 1"/>
+              <a:gd name="f65" fmla="*/ f54 f29 1"/>
+              <a:gd name="f66" fmla="*/ f59 f8 1"/>
+              <a:gd name="f67" fmla="abs f60"/>
+              <a:gd name="f68" fmla="?: f60 0 f1"/>
+              <a:gd name="f69" fmla="?: f60 f1 0"/>
+              <a:gd name="f70" fmla="?: f60 f39 f40"/>
+              <a:gd name="f71" fmla="abs f61"/>
+              <a:gd name="f72" fmla="abs f62"/>
+              <a:gd name="f73" fmla="?: f61 f16 f2"/>
+              <a:gd name="f74" fmla="?: f61 f2 f16"/>
+              <a:gd name="f75" fmla="?: f61 f3 f2"/>
+              <a:gd name="f76" fmla="?: f61 f2 f3"/>
+              <a:gd name="f77" fmla="abs f63"/>
+              <a:gd name="f78" fmla="?: f63 f16 f2"/>
+              <a:gd name="f79" fmla="?: f63 f2 f16"/>
+              <a:gd name="f80" fmla="?: f63 f42 f41"/>
+              <a:gd name="f81" fmla="?: f63 f41 f42"/>
+              <a:gd name="f82" fmla="*/ f66 1 f1"/>
+              <a:gd name="f83" fmla="?: f28 f69 f68"/>
+              <a:gd name="f84" fmla="?: f28 f68 f69"/>
+              <a:gd name="f85" fmla="?: f61 f76 f75"/>
+              <a:gd name="f86" fmla="?: f61 f75 f76"/>
+              <a:gd name="f87" fmla="?: f62 f74 f73"/>
+              <a:gd name="f88" fmla="?: f27 f80 f81"/>
+              <a:gd name="f89" fmla="?: f27 f78 f79"/>
+              <a:gd name="f90" fmla="*/ f67 f29 1"/>
+              <a:gd name="f91" fmla="*/ f71 f29 1"/>
+              <a:gd name="f92" fmla="*/ f72 f29 1"/>
+              <a:gd name="f93" fmla="*/ f77 f29 1"/>
+              <a:gd name="f94" fmla="+- 0 0 f82"/>
+              <a:gd name="f95" fmla="?: f60 f83 f84"/>
+              <a:gd name="f96" fmla="?: f62 f86 f85"/>
+              <a:gd name="f97" fmla="+- 0 0 f94"/>
+              <a:gd name="f98" fmla="*/ f97 f1 1"/>
+              <a:gd name="f99" fmla="*/ f98 1 f8"/>
+              <a:gd name="f100" fmla="+- f99 0 f2"/>
+              <a:gd name="f101" fmla="cos 1 f100"/>
+              <a:gd name="f102" fmla="+- 0 0 f101"/>
+              <a:gd name="f103" fmla="+- 0 0 f102"/>
+              <a:gd name="f104" fmla="val f103"/>
+              <a:gd name="f105" fmla="+- 0 0 f104"/>
+              <a:gd name="f106" fmla="*/ f15 f105 1"/>
+              <a:gd name="f107" fmla="*/ f106 3163 1"/>
+              <a:gd name="f108" fmla="*/ f107 1 7636"/>
+              <a:gd name="f109" fmla="+- f7 f108 0"/>
+              <a:gd name="f110" fmla="+- f43 0 f108"/>
+              <a:gd name="f111" fmla="+- f44 0 f108"/>
+              <a:gd name="f112" fmla="*/ f109 f29 1"/>
+              <a:gd name="f113" fmla="*/ f110 f29 1"/>
+              <a:gd name="f114" fmla="*/ f111 f29 1"/>
+            </a:gdLst>
+            <a:ahLst/>
+            <a:cxnLst>
+              <a:cxn ang="3cd4">
+                <a:pos x="hc" y="t"/>
+              </a:cxn>
+              <a:cxn ang="0">
+                <a:pos x="r" y="vc"/>
+              </a:cxn>
+              <a:cxn ang="cd4">
+                <a:pos x="hc" y="b"/>
+              </a:cxn>
+              <a:cxn ang="cd2">
+                <a:pos x="l" y="vc"/>
+              </a:cxn>
+            </a:cxnLst>
+            <a:rect l="f112" t="f112" r="f113" b="f114"/>
+            <a:pathLst>
+              <a:path>
+                <a:moveTo>
+                  <a:pt x="f49" y="f50"/>
+                </a:moveTo>
+                <a:arcTo wR="f51" hR="f52" stAng="f56" swAng="f48"/>
+                <a:lnTo>
+                  <a:pt x="f50" y="f64"/>
+                </a:lnTo>
+                <a:arcTo wR="f52" hR="f90" stAng="f95" swAng="f70"/>
+                <a:lnTo>
+                  <a:pt x="f65" y="f57"/>
+                </a:lnTo>
+                <a:arcTo wR="f91" hR="f92" stAng="f96" swAng="f87"/>
+                <a:lnTo>
+                  <a:pt x="f58" y="f49"/>
+                </a:lnTo>
+                <a:arcTo wR="f93" hR="f51" stAng="f88" swAng="f89"/>
+                <a:close/>
+              </a:path>
+            </a:pathLst>
+          </a:custGeom>
+          <a:noFill/>
+          <a:ln w="28575" cap="flat">
+            <a:solidFill>
+              <a:srgbClr val="F7C667"/>
+            </a:solidFill>
+            <a:prstDash val="solid"/>
+          </a:ln>
+        </p:spPr>
+        <p:txBody>
+          <a:bodyPr vert="horz" wrap="square" lIns="91440" tIns="45720" rIns="91440" bIns="45720" anchor="ctr" anchorCtr="1" compatLnSpc="1">
+            <a:noAutofit/>
+          </a:bodyPr>
+          <a:lstStyle/>
+          <a:p>
+            <a:pPr marL="0" marR="0" lvl="0" indent="0" algn="ctr" defTabSz="914400" rtl="0" fontAlgn="auto" hangingPunct="1">
+              <a:lnSpc>
+                <a:spcPct val="100000"/>
+              </a:lnSpc>
+              <a:spcBef>
+                <a:spcPts val="0"/>
+              </a:spcBef>
+              <a:spcAft>
+                <a:spcPts val="0"/>
+              </a:spcAft>
+              <a:buNone/>
+              <a:tabLst/>
+              <a:defRPr sz="1800" b="0" i="0" u="none" strike="noStrike" kern="0" cap="none" spc="0" baseline="0">
+                <a:solidFill>
+                  <a:srgbClr val="000000"/>
+                </a:solidFill>
+                <a:uFillTx/>
+              </a:defRPr>
+            </a:pPr>
+            <a:endParaRPr lang="ru-RU" sz="1800" b="0" i="0" u="none" strike="noStrike" kern="1200" cap="none" spc="0" baseline="0">
+              <a:solidFill>
+                <a:srgbClr val="FFFFFF"/>
+              </a:solidFill>
+              <a:uFillTx/>
+              <a:latin typeface="Calibri"/>
+            </a:endParaRPr>
+          </a:p>
+        </p:txBody>
+      </p:sp>
+      <p:sp>
+        <p:nvSpPr>
+          <p:cNvPr id="7" name="TextBox 6">
+            <a:extLst>
+              <a:ext uri="{FF2B5EF4-FFF2-40B4-BE49-F238E27FC236}">
+                <a16:creationId xmlns:a16="http://schemas.microsoft.com/office/drawing/2014/main" id="{455D6E2A-F486-C4C5-39DD-F4C7598D5CC9}"/>
+              </a:ext>
+            </a:extLst>
+          </p:cNvPr>
+          <p:cNvSpPr txBox="1"/>
+          <p:nvPr/>
+        </p:nvSpPr>
+        <p:spPr>
+          <a:xfrm>
+            <a:off x="1216298" y="5571490"/>
+            <a:ext cx="3549621" cy="1107996"/>
+          </a:xfrm>
+          <a:prstGeom prst="rect">
+            <a:avLst/>
+          </a:prstGeom>
+          <a:noFill/>
+        </p:spPr>
+        <p:txBody>
+          <a:bodyPr wrap="square" rtlCol="0">
+            <a:spAutoFit/>
+          </a:bodyPr>
+          <a:lstStyle/>
+          <a:p>
+            <a:pPr marL="285750" indent="-285750" algn="ctr">
+              <a:lnSpc>
+                <a:spcPct val="200000"/>
+              </a:lnSpc>
+              <a:buFont typeface="Courier New" panose="02070309020205020404" pitchFamily="49" charset="0"/>
+              <a:buChar char="o"/>
+            </a:pPr>
+            <a:r>
+              <a:rPr lang="ru-RU" sz="2400" dirty="0">
+                <a:solidFill>
+                  <a:srgbClr val="F7C667"/>
+                </a:solidFill>
+              </a:rPr>
+              <a:t>Постепенное развитие</a:t>
+            </a:r>
+          </a:p>
+          <a:p>
+            <a:pPr algn="just"/>
+            <a:endParaRPr lang="ru-RU" dirty="0">
+              <a:solidFill>
+                <a:srgbClr val="F7C667"/>
+              </a:solidFill>
+            </a:endParaRPr>
+          </a:p>
+        </p:txBody>
+      </p:sp>
+      <p:sp>
+        <p:nvSpPr>
+          <p:cNvPr id="8" name="Прямоугольник: скругленные углы 27">
+            <a:extLst>
+              <a:ext uri="{FF2B5EF4-FFF2-40B4-BE49-F238E27FC236}">
+                <a16:creationId xmlns:a16="http://schemas.microsoft.com/office/drawing/2014/main" id="{F79C370B-55E6-1C90-106D-70CDBBD526F1}"/>
+              </a:ext>
+            </a:extLst>
+          </p:cNvPr>
+          <p:cNvSpPr/>
+          <p:nvPr/>
+        </p:nvSpPr>
+        <p:spPr>
+          <a:xfrm>
+            <a:off x="938385" y="5594281"/>
+            <a:ext cx="8723800" cy="995794"/>
+          </a:xfrm>
+          <a:custGeom>
+            <a:avLst>
+              <a:gd name="f10" fmla="val 7338"/>
+            </a:avLst>
+            <a:gdLst>
+              <a:gd name="f1" fmla="val 10800000"/>
+              <a:gd name="f2" fmla="val 5400000"/>
+              <a:gd name="f3" fmla="val 16200000"/>
+              <a:gd name="f4" fmla="val w"/>
+              <a:gd name="f5" fmla="val h"/>
+              <a:gd name="f6" fmla="val ss"/>
+              <a:gd name="f7" fmla="val 0"/>
+              <a:gd name="f8" fmla="*/ 5419351 1 1725033"/>
+              <a:gd name="f9" fmla="val 45"/>
+              <a:gd name="f10" fmla="val 7338"/>
+              <a:gd name="f11" fmla="abs f4"/>
+              <a:gd name="f12" fmla="abs f5"/>
+              <a:gd name="f13" fmla="abs f6"/>
+              <a:gd name="f14" fmla="*/ f8 1 180"/>
+              <a:gd name="f15" fmla="val f10"/>
+              <a:gd name="f16" fmla="+- 0 0 f2"/>
+              <a:gd name="f17" fmla="?: f11 f4 1"/>
+              <a:gd name="f18" fmla="?: f12 f5 1"/>
+              <a:gd name="f19" fmla="?: f13 f6 1"/>
+              <a:gd name="f20" fmla="*/ f9 f14 1"/>
+              <a:gd name="f21" fmla="+- f7 f15 0"/>
+              <a:gd name="f22" fmla="*/ f17 1 21600"/>
+              <a:gd name="f23" fmla="*/ f18 1 21600"/>
+              <a:gd name="f24" fmla="*/ 21600 f17 1"/>
+              <a:gd name="f25" fmla="*/ 21600 f18 1"/>
+              <a:gd name="f26" fmla="+- 0 0 f20"/>
+              <a:gd name="f27" fmla="+- f7 0 f21"/>
+              <a:gd name="f28" fmla="+- f21 0 f7"/>
+              <a:gd name="f29" fmla="min f23 f22"/>
+              <a:gd name="f30" fmla="*/ f24 1 f19"/>
+              <a:gd name="f31" fmla="*/ f25 1 f19"/>
+              <a:gd name="f32" fmla="*/ f26 f1 1"/>
+              <a:gd name="f33" fmla="abs f27"/>
+              <a:gd name="f34" fmla="abs f28"/>
+              <a:gd name="f35" fmla="?: f27 f16 f2"/>
+              <a:gd name="f36" fmla="?: f27 f2 f16"/>
+              <a:gd name="f37" fmla="?: f27 f3 f2"/>
+              <a:gd name="f38" fmla="?: f27 f2 f3"/>
+              <a:gd name="f39" fmla="?: f28 f16 f2"/>
+              <a:gd name="f40" fmla="?: f28 f2 f16"/>
+              <a:gd name="f41" fmla="?: f27 0 f1"/>
+              <a:gd name="f42" fmla="?: f27 f1 0"/>
+              <a:gd name="f43" fmla="val f30"/>
+              <a:gd name="f44" fmla="val f31"/>
+              <a:gd name="f45" fmla="*/ f32 1 f8"/>
+              <a:gd name="f46" fmla="?: f27 f38 f37"/>
+              <a:gd name="f47" fmla="?: f27 f37 f38"/>
+              <a:gd name="f48" fmla="?: f28 f36 f35"/>
+              <a:gd name="f49" fmla="*/ f21 f29 1"/>
+              <a:gd name="f50" fmla="*/ f7 f29 1"/>
+              <a:gd name="f51" fmla="*/ f33 f29 1"/>
+              <a:gd name="f52" fmla="*/ f34 f29 1"/>
+              <a:gd name="f53" fmla="+- f44 0 f15"/>
+              <a:gd name="f54" fmla="+- f43 0 f15"/>
+              <a:gd name="f55" fmla="+- f45 0 f2"/>
+              <a:gd name="f56" fmla="?: f28 f47 f46"/>
+              <a:gd name="f57" fmla="*/ f44 f29 1"/>
+              <a:gd name="f58" fmla="*/ f43 f29 1"/>
+              <a:gd name="f59" fmla="+- f55 f2 0"/>
+              <a:gd name="f60" fmla="+- f44 0 f53"/>
+              <a:gd name="f61" fmla="+- f43 0 f54"/>
+              <a:gd name="f62" fmla="+- f53 0 f44"/>
+              <a:gd name="f63" fmla="+- f54 0 f43"/>
+              <a:gd name="f64" fmla="*/ f53 f29 1"/>
+              <a:gd name="f65" fmla="*/ f54 f29 1"/>
+              <a:gd name="f66" fmla="*/ f59 f8 1"/>
+              <a:gd name="f67" fmla="abs f60"/>
+              <a:gd name="f68" fmla="?: f60 0 f1"/>
+              <a:gd name="f69" fmla="?: f60 f1 0"/>
+              <a:gd name="f70" fmla="?: f60 f39 f40"/>
+              <a:gd name="f71" fmla="abs f61"/>
+              <a:gd name="f72" fmla="abs f62"/>
+              <a:gd name="f73" fmla="?: f61 f16 f2"/>
+              <a:gd name="f74" fmla="?: f61 f2 f16"/>
+              <a:gd name="f75" fmla="?: f61 f3 f2"/>
+              <a:gd name="f76" fmla="?: f61 f2 f3"/>
+              <a:gd name="f77" fmla="abs f63"/>
+              <a:gd name="f78" fmla="?: f63 f16 f2"/>
+              <a:gd name="f79" fmla="?: f63 f2 f16"/>
+              <a:gd name="f80" fmla="?: f63 f42 f41"/>
+              <a:gd name="f81" fmla="?: f63 f41 f42"/>
+              <a:gd name="f82" fmla="*/ f66 1 f1"/>
+              <a:gd name="f83" fmla="?: f28 f69 f68"/>
+              <a:gd name="f84" fmla="?: f28 f68 f69"/>
+              <a:gd name="f85" fmla="?: f61 f76 f75"/>
+              <a:gd name="f86" fmla="?: f61 f75 f76"/>
+              <a:gd name="f87" fmla="?: f62 f74 f73"/>
+              <a:gd name="f88" fmla="?: f27 f80 f81"/>
+              <a:gd name="f89" fmla="?: f27 f78 f79"/>
+              <a:gd name="f90" fmla="*/ f67 f29 1"/>
+              <a:gd name="f91" fmla="*/ f71 f29 1"/>
+              <a:gd name="f92" fmla="*/ f72 f29 1"/>
+              <a:gd name="f93" fmla="*/ f77 f29 1"/>
+              <a:gd name="f94" fmla="+- 0 0 f82"/>
+              <a:gd name="f95" fmla="?: f60 f83 f84"/>
+              <a:gd name="f96" fmla="?: f62 f86 f85"/>
+              <a:gd name="f97" fmla="+- 0 0 f94"/>
+              <a:gd name="f98" fmla="*/ f97 f1 1"/>
+              <a:gd name="f99" fmla="*/ f98 1 f8"/>
+              <a:gd name="f100" fmla="+- f99 0 f2"/>
+              <a:gd name="f101" fmla="cos 1 f100"/>
+              <a:gd name="f102" fmla="+- 0 0 f101"/>
+              <a:gd name="f103" fmla="+- 0 0 f102"/>
+              <a:gd name="f104" fmla="val f103"/>
+              <a:gd name="f105" fmla="+- 0 0 f104"/>
+              <a:gd name="f106" fmla="*/ f15 f105 1"/>
+              <a:gd name="f107" fmla="*/ f106 3163 1"/>
+              <a:gd name="f108" fmla="*/ f107 1 7636"/>
+              <a:gd name="f109" fmla="+- f7 f108 0"/>
+              <a:gd name="f110" fmla="+- f43 0 f108"/>
+              <a:gd name="f111" fmla="+- f44 0 f108"/>
+              <a:gd name="f112" fmla="*/ f109 f29 1"/>
+              <a:gd name="f113" fmla="*/ f110 f29 1"/>
+              <a:gd name="f114" fmla="*/ f111 f29 1"/>
+            </a:gdLst>
+            <a:ahLst/>
+            <a:cxnLst>
+              <a:cxn ang="3cd4">
+                <a:pos x="hc" y="t"/>
+              </a:cxn>
+              <a:cxn ang="0">
+                <a:pos x="r" y="vc"/>
+              </a:cxn>
+              <a:cxn ang="cd4">
+                <a:pos x="hc" y="b"/>
+              </a:cxn>
+              <a:cxn ang="cd2">
+                <a:pos x="l" y="vc"/>
+              </a:cxn>
+            </a:cxnLst>
+            <a:rect l="f112" t="f112" r="f113" b="f114"/>
+            <a:pathLst>
+              <a:path>
+                <a:moveTo>
+                  <a:pt x="f49" y="f50"/>
+                </a:moveTo>
+                <a:arcTo wR="f51" hR="f52" stAng="f56" swAng="f48"/>
+                <a:lnTo>
+                  <a:pt x="f50" y="f64"/>
+                </a:lnTo>
+                <a:arcTo wR="f52" hR="f90" stAng="f95" swAng="f70"/>
+                <a:lnTo>
+                  <a:pt x="f65" y="f57"/>
+                </a:lnTo>
+                <a:arcTo wR="f91" hR="f92" stAng="f96" swAng="f87"/>
+                <a:lnTo>
+                  <a:pt x="f58" y="f49"/>
+                </a:lnTo>
+                <a:arcTo wR="f93" hR="f51" stAng="f88" swAng="f89"/>
+                <a:close/>
+              </a:path>
+            </a:pathLst>
+          </a:custGeom>
+          <a:noFill/>
+          <a:ln w="28575" cap="flat">
+            <a:solidFill>
+              <a:srgbClr val="F7C667"/>
+            </a:solidFill>
+            <a:prstDash val="solid"/>
+          </a:ln>
+        </p:spPr>
+        <p:txBody>
+          <a:bodyPr vert="horz" wrap="square" lIns="91440" tIns="45720" rIns="91440" bIns="45720" anchor="ctr" anchorCtr="1" compatLnSpc="1">
+            <a:noAutofit/>
+          </a:bodyPr>
+          <a:lstStyle/>
+          <a:p>
+            <a:pPr marL="0" marR="0" lvl="0" indent="0" algn="ctr" defTabSz="914400" rtl="0" fontAlgn="auto" hangingPunct="1">
+              <a:lnSpc>
+                <a:spcPct val="100000"/>
+              </a:lnSpc>
+              <a:spcBef>
+                <a:spcPts val="0"/>
+              </a:spcBef>
+              <a:spcAft>
+                <a:spcPts val="0"/>
+              </a:spcAft>
+              <a:buNone/>
+              <a:tabLst/>
+              <a:defRPr sz="1800" b="0" i="0" u="none" strike="noStrike" kern="0" cap="none" spc="0" baseline="0">
+                <a:solidFill>
+                  <a:srgbClr val="000000"/>
+                </a:solidFill>
+                <a:uFillTx/>
+              </a:defRPr>
+            </a:pPr>
+            <a:endParaRPr lang="ru-RU" sz="1800" b="0" i="0" u="none" strike="noStrike" kern="1200" cap="none" spc="0" baseline="0">
+              <a:solidFill>
+                <a:srgbClr val="FFFFFF"/>
+              </a:solidFill>
+              <a:uFillTx/>
+              <a:latin typeface="Calibri"/>
             </a:endParaRPr>
           </a:p>
         </p:txBody>
@@ -14318,13 +14454,13 @@
   <p:clrMapOvr>
     <a:masterClrMapping/>
   </p:clrMapOvr>
-  <mc:AlternateContent xmlns:mc="http://schemas.openxmlformats.org/markup-compatibility/2006">
-    <mc:Choice xmlns:p14="http://schemas.microsoft.com/office/powerpoint/2010/main" Requires="p14">
+  <mc:AlternateContent xmlns:mc="http://schemas.openxmlformats.org/markup-compatibility/2006" xmlns:p14="http://schemas.microsoft.com/office/powerpoint/2010/main">
+    <mc:Choice Requires="p14">
       <p:transition spd="med" p14:dur="700">
         <p:fade/>
       </p:transition>
     </mc:Choice>
-    <mc:Fallback>
+    <mc:Fallback xmlns="">
       <p:transition spd="med">
         <p:fade/>
       </p:transition>
@@ -15155,8 +15291,8 @@
         </p:nvSpPr>
         <p:spPr>
           <a:xfrm>
-            <a:off x="844127" y="1973801"/>
-            <a:ext cx="5169048" cy="841897"/>
+            <a:off x="844127" y="1973802"/>
+            <a:ext cx="4803638" cy="841897"/>
           </a:xfrm>
           <a:prstGeom prst="rect">
             <a:avLst/>
@@ -15198,7 +15334,7 @@
                 <a:uFillTx/>
                 <a:latin typeface="Montserrat Alternates" pitchFamily="2"/>
               </a:rPr>
-              <a:t>Гибкая система напоминаний</a:t>
+              <a:t>Хорошие новости каждый день</a:t>
             </a:r>
           </a:p>
           <a:p>
@@ -15427,7 +15563,7 @@
                 <a:uFillTx/>
                 <a:latin typeface="Montserrat Alternates" pitchFamily="2"/>
               </a:rPr>
-              <a:t>Хорошие новости каждый день</a:t>
+              <a:t>Гибкая система напоминаний</a:t>
             </a:r>
           </a:p>
           <a:p>
@@ -15837,13 +15973,13 @@
   <p:clrMapOvr>
     <a:masterClrMapping/>
   </p:clrMapOvr>
-  <mc:AlternateContent xmlns:mc="http://schemas.openxmlformats.org/markup-compatibility/2006">
-    <mc:Choice xmlns:p14="http://schemas.microsoft.com/office/powerpoint/2010/main" Requires="p14">
+  <mc:AlternateContent xmlns:mc="http://schemas.openxmlformats.org/markup-compatibility/2006" xmlns:p14="http://schemas.microsoft.com/office/powerpoint/2010/main">
+    <mc:Choice Requires="p14">
       <p:transition spd="med" p14:dur="700">
         <p:fade/>
       </p:transition>
     </mc:Choice>
-    <mc:Fallback>
+    <mc:Fallback xmlns="">
       <p:transition spd="med">
         <p:fade/>
       </p:transition>
@@ -16717,7 +16853,7 @@
                 <a:uFillTx/>
                 <a:latin typeface="Montserrat Alternates" pitchFamily="2"/>
               </a:rPr>
-              <a:t>Гибкая система напоминаний</a:t>
+              <a:t>Хорошие новости каждый день</a:t>
             </a:r>
           </a:p>
           <a:p>
@@ -16812,7 +16948,7 @@
                 <a:uFillTx/>
                 <a:latin typeface="Montserrat Alternates" pitchFamily="2"/>
               </a:rPr>
-              <a:t>Адаптивная статистика</a:t>
+              <a:t>Гибкая система напоминаний</a:t>
             </a:r>
           </a:p>
         </p:txBody>
@@ -16900,7 +17036,7 @@
         </p:nvSpPr>
         <p:spPr>
           <a:xfrm>
-            <a:off x="892887" y="3664949"/>
+            <a:off x="844127" y="3664949"/>
             <a:ext cx="7570999" cy="1231106"/>
           </a:xfrm>
           <a:prstGeom prst="rect">
@@ -16946,7 +17082,7 @@
                 <a:uFillTx/>
                 <a:latin typeface="Montserrat Alternates" pitchFamily="2"/>
               </a:rPr>
-              <a:t>Хорошие новости каждый день</a:t>
+              <a:t>Адаптивная статистика</a:t>
             </a:r>
           </a:p>
           <a:p>
@@ -17356,13 +17492,13 @@
   <p:clrMapOvr>
     <a:masterClrMapping/>
   </p:clrMapOvr>
-  <mc:AlternateContent xmlns:mc="http://schemas.openxmlformats.org/markup-compatibility/2006">
-    <mc:Choice xmlns:p14="http://schemas.microsoft.com/office/powerpoint/2010/main" Requires="p14">
+  <mc:AlternateContent xmlns:mc="http://schemas.openxmlformats.org/markup-compatibility/2006" xmlns:p14="http://schemas.microsoft.com/office/powerpoint/2010/main">
+    <mc:Choice Requires="p14">
       <p:transition spd="med" p14:dur="700">
         <p:fade/>
       </p:transition>
     </mc:Choice>
-    <mc:Fallback>
+    <mc:Fallback xmlns="">
       <p:transition spd="med">
         <p:fade/>
       </p:transition>
